--- a/slide/slide-3-firewall.pptx
+++ b/slide/slide-3-firewall.pptx
@@ -1493,7 +1493,7 @@
           <a:p>
             <a:r>
               <a:rPr lang="en-US" dirty="0"/>
-              <a:t>Nelle prossime lezioni avremo un server dell'applicazione nelle subnet private, un database nelle subnet database e delle persone collegate da casa con la VPN. Le route table permettono già a tutte le subnet di parlarsi. Ma non vogliamo che chiunque nella rete possa raggiungere il database. Le regole che vogliamo sono queste: il server parla con il database, l'amministratore in VPN anche, nessun altro. Un firewall è proprio questo: un insieme di regole su cosa può passare.</a:t>
+              <a:t>Nelle prossime lezioni avremo un server dell'applicazione nelle subnet private, un database nelle subnet database e delle persone collegate da casa con la VPN. Le route table permettono già a tutte le subnet di parlarsi. Ma non vogliamo che chiunque nella rete possa raggiungere il database. Le regole che vogliamo sono queste: il server parla con il database, l'amministratore in VPN anche, nessun altro. Il server può anche chiamare internet sulla 443, solo in uscita: per scaricare gli aggiornamenti di sicurezza e per parlare con i servizi AWS, come SSM, S3 e Secrets Manager, che vedremo nelle prossime lezioni. Nessuno da internet può chiamare lui. Un firewall è proprio questo: un insieme di regole su cosa può passare.</a:t>
             </a:r>
             <a:endParaRPr lang="en-US" dirty="0"/>
           </a:p>
@@ -14975,7 +14975,7 @@
                           <a:ea typeface="Calibri" pitchFamily="34" charset="-122"/>
                           <a:cs typeface="Calibri" pitchFamily="34" charset="-120"/>
                         </a:rPr>
-                        <a:t>internet, porta 443 (aggiornamenti)</a:t>
+                        <a:t>internet, 443: SOLO in uscita (aggiornamenti, servizi AWS)</a:t>
                       </a:r>
                       <a:endParaRPr lang="en-US" sz="1700" dirty="0">
                         <a:latin typeface="Calibri" charset="0"/>

--- a/slide/slide-3-firewall.pptx
+++ b/slide/slide-3-firewall.pptx
@@ -701,7 +701,7 @@
           <a:p>
             <a:r>
               <a:rPr lang="en-US" dirty="0"/>
-              <a:t>Il nostro piano usa tre Security Group. app lo indosserà il server, nella lezione 5: accetta la 8080 dalla VPN; chiama internet sulla 443 e il database sulla 5432. db lo indosserà il database, nella lezione 6: accetta la 5432 solo da app e da vpn; in uscita niente. vpn lo indosserà la VPN, nella lezione 4: può raggiungere tutta la nostra rete, ma niente fuori. Distinguere gli amministratori dagli sviluppatori lo farà la VPN, con le sue regole per gruppo.</a:t>
+              <a:t>Il nostro piano usa tre Security Group. app lo indosserà il server, nella lezione 4: accetta la 8080 dalla VPN; chiama internet sulla 443 e il database sulla 5432. db lo indosserà il database, nella lezione 6: accetta la 5432 solo da app e da vpn; in uscita niente. vpn lo indosserà il router della VPN Tailscale, nella lezione 5: può raggiungere tutta la nostra rete. Distinguere gli amministratori dagli sviluppatori lo farà la VPN, con le sue regole per gruppo.</a:t>
             </a:r>
             <a:endParaRPr lang="en-US" dirty="0"/>
           </a:p>
@@ -877,7 +877,7 @@
           <a:p>
             <a:r>
               <a:rPr lang="en-US" dirty="0"/>
-              <a:t>Le subnet pubbliche e private restano con la NACL di default; le subnet database, le più delicate, hanno la loro. In ingresso: la 5432 da ciascuna subnet privata, e tutto il traffico tra le due subnet database, che servirà al database su due data center. In uscita: le risposte verso le porte effimere delle subnet private, e di nuovo il traffico tra le subnet database. Gli amministratori in VPN? Nella lezione 4 la VPN entrerà dalle subnet private, quindi queste regole valgono anche per loro.</a:t>
+              <a:t>Le subnet pubbliche e private restano con la NACL di default; le subnet database, le più delicate, hanno la loro. In ingresso: la 5432 da ciascuna subnet privata, e tutto il traffico tra le due subnet database, che servirà al database su due data center. In uscita: le risposte verso le porte effimere delle subnet private, e di nuovo il traffico tra le subnet database. Gli amministratori in VPN? Nella lezione 5 il router della VPN starà in una subnet privata, quindi queste regole valgono anche per loro.</a:t>
             </a:r>
             <a:endParaRPr lang="en-US" dirty="0"/>
           </a:p>
@@ -1581,7 +1581,7 @@
           <a:p>
             <a:r>
               <a:rPr lang="en-US" dirty="0"/>
-              <a:t>Per provare le regole non abbiamo ancora né server né database: arriveranno nelle lezioni 5 e 6. Usiamo due cose. Le interfacce di rete, ENI: sono le prese di rete a cui di solito si attaccano server e database. Le creiamo da sole, ognuna con il suo Security Group, e per le regole di rete si comportano come i veri. Non costano niente. Poi il Reachability Analyzer di AWS: data una sorgente e una destinazione, legge route table, NACL e Security Group e risponde raggiungibile o non raggiungibile, e per colpa di quale regola. Senza mandare traffico vero. Ogni analisi ha un piccolo costo: ne facciamo poche.</a:t>
+              <a:t>Per provare le regole non abbiamo ancora né server né database: arriveranno nelle lezioni 4 e 6. Usiamo due cose. Le interfacce di rete, ENI: sono le prese di rete a cui di solito si attaccano server e database. Le creiamo da sole, ognuna con il suo Security Group, e per le regole di rete si comportano come i veri. Non costano niente. Poi il Reachability Analyzer di AWS: data una sorgente e una destinazione, legge route table, NACL e Security Group e risponde raggiungibile o non raggiungibile, e per colpa di quale regola. Senza mandare traffico vero. Ogni analisi ha un piccolo costo: ne facciamo poche.</a:t>
             </a:r>
             <a:endParaRPr lang="en-US" dirty="0"/>
           </a:p>
@@ -1757,7 +1757,7 @@
           <a:p>
             <a:r>
               <a:rPr lang="en-US" dirty="0"/>
-              <a:t>Seconda parte. Cinque: commentate in security.tf la regola delle porte effimere e lanciate solo plan. Rispondete senza applicare: la richiesta arriverebbe? Sì. La risposta tornerebbe? No. Quindi la connessione non funziona. Rimettete la regola: lo vedremo succedere davvero con un server e un database veri nelle lezioni 5 e 6. Sei: aprite in console il Security Group default, verificate che sia vuoto, aggiungete una regola a mano e lanciate plan: Terraform se ne accorge. Sette: cancellate il file del laboratorio, apply, e a fine giornata destroy.</a:t>
+              <a:t>Seconda parte. Cinque: commentate in security.tf la regola delle porte effimere e lanciate solo plan. Rispondete senza applicare: la richiesta arriverebbe? Sì. La risposta tornerebbe? No. Quindi la connessione non funziona. Rimettete la regola: lo vedremo succedere davvero con un server e un database veri nelle lezioni 4 e 6. Sei: aprite in console il Security Group default, verificate che sia vuoto, aggiungete una regola a mano e lanciate plan: Terraform se ne accorge. Sette: cancellate il file del laboratorio, apply, e a fine giornata destroy.</a:t>
             </a:r>
             <a:endParaRPr lang="en-US" dirty="0"/>
           </a:p>
@@ -1933,7 +1933,7 @@
           <a:p>
             <a:r>
               <a:rPr lang="en-US" dirty="0"/>
-              <a:t>Riassumendo. Il materiale di studio è la dispensa 3: contiene tutto il codice di security.tf spiegato blocco per blocco e il laboratorio completo con il Reachability Analyzer. La prossima volta costruiamo la VPN, che indosserà il Security Group vpn creato oggi.</a:t>
+              <a:t>Riassumendo. Il materiale di studio è la dispensa 3: contiene tutto il codice di security.tf spiegato blocco per blocco e il laboratorio completo con il Reachability Analyzer. La prossima volta creiamo il server dell'applicazione, che indosserà il Security Group app creato oggi; nella lezione 5 la VPN userà il Security Group vpn.</a:t>
             </a:r>
             <a:endParaRPr lang="en-US" dirty="0"/>
           </a:p>
@@ -4383,7 +4383,7 @@
                 <a:ea typeface="Calibri" pitchFamily="34" charset="-122"/>
                 <a:cs typeface="Calibri" pitchFamily="34" charset="-120"/>
               </a:rPr>
-              <a:t>la VPN (lezione 4)</a:t>
+              <a:t>router VPN (lezione 5)</a:t>
             </a:r>
             <a:endParaRPr lang="en-US" sz="1700" dirty="0"/>
           </a:p>
@@ -4466,7 +4466,7 @@
                 <a:ea typeface="Calibri" pitchFamily="34" charset="-122"/>
                 <a:cs typeface="Calibri" pitchFamily="34" charset="-120"/>
               </a:rPr>
-              <a:t>il server (lezione 5)</a:t>
+              <a:t>il server (lezione 4)</a:t>
             </a:r>
             <a:endParaRPr lang="en-US" sz="1700" dirty="0"/>
           </a:p>
@@ -9285,7 +9285,7 @@
                 <a:ea typeface="Calibri" pitchFamily="34" charset="-122"/>
                 <a:cs typeface="Calibri" pitchFamily="34" charset="-120"/>
               </a:rPr>
-              <a:t>La VPN (lezione 4) entrerà dalle subnet private: queste regole valgono anche per gli amministratori.</a:t>
+              <a:t>Il router della VPN (lezione 5) starà in una subnet privata: queste regole valgono anche per gli amministratori.</a:t>
             </a:r>
             <a:endParaRPr lang="en-US" sz="1800" dirty="0"/>
           </a:p>
@@ -17595,7 +17595,7 @@
                 <a:ea typeface="Calibri" pitchFamily="34" charset="-122"/>
                 <a:cs typeface="Calibri" pitchFamily="34" charset="-120"/>
               </a:rPr>
-              <a:t>Il passo 5 lo vedremo succedere davvero con un server e un database veri (lezioni 5 e 6).</a:t>
+              <a:t>Il passo 5 lo vedremo succedere davvero con un server e un database veri (lezioni 4 e 6).</a:t>
             </a:r>
             <a:endParaRPr lang="en-US" sz="1800" dirty="0"/>
           </a:p>
@@ -20136,7 +20136,7 @@
                 <a:ea typeface="Calibri" pitchFamily="34" charset="-122"/>
                 <a:cs typeface="Calibri" pitchFamily="34" charset="-120"/>
               </a:rPr>
-              <a:t>Accesso remoto: Client VPN con MFA</a:t>
+              <a:t>EC2: il server</a:t>
             </a:r>
             <a:endParaRPr lang="en-US" sz="1400" dirty="0"/>
           </a:p>
